--- a/順服.pptx
+++ b/順服.pptx
@@ -167,7 +167,7 @@
           <a:lstStyle/>
           <a:p>
             <a:r>
-              <a:rPr lang="en-US" altLang="zh-TW" smtClean="0"/>
+              <a:rPr lang="en-US" altLang="zh-TW"/>
               <a:t>Click to edit Master title style</a:t>
             </a:r>
             <a:endParaRPr lang="zh-TW" altLang="en-US"/>
@@ -286,7 +286,7 @@
           </a:lstStyle>
           <a:p>
             <a:r>
-              <a:rPr lang="en-US" altLang="zh-TW" smtClean="0"/>
+              <a:rPr lang="en-US" altLang="zh-TW"/>
               <a:t>Click to edit Master subtitle style</a:t>
             </a:r>
             <a:endParaRPr lang="zh-TW" altLang="en-US"/>
@@ -310,7 +310,7 @@
           <a:p>
             <a:fld id="{0A97663F-A412-4EA0-B086-A49073A59FF1}" type="datetimeFigureOut">
               <a:rPr lang="zh-TW" altLang="en-US" smtClean="0"/>
-              <a:t>2023/1/14</a:t>
+              <a:t>2024/10/1</a:t>
             </a:fld>
             <a:endParaRPr lang="zh-TW" altLang="en-US"/>
           </a:p>
@@ -399,7 +399,7 @@
           <a:lstStyle/>
           <a:p>
             <a:r>
-              <a:rPr lang="en-US" altLang="zh-TW" smtClean="0"/>
+              <a:rPr lang="en-US" altLang="zh-TW"/>
               <a:t>Click to edit Master title style</a:t>
             </a:r>
             <a:endParaRPr lang="zh-TW" altLang="en-US"/>
@@ -423,35 +423,35 @@
           <a:p>
             <a:pPr lvl="0"/>
             <a:r>
-              <a:rPr lang="en-US" altLang="zh-TW" smtClean="0"/>
+              <a:rPr lang="en-US" altLang="zh-TW"/>
               <a:t>Click to edit Master text styles</a:t>
             </a:r>
           </a:p>
           <a:p>
             <a:pPr lvl="1"/>
             <a:r>
-              <a:rPr lang="en-US" altLang="zh-TW" smtClean="0"/>
+              <a:rPr lang="en-US" altLang="zh-TW"/>
               <a:t>Second level</a:t>
             </a:r>
           </a:p>
           <a:p>
             <a:pPr lvl="2"/>
             <a:r>
-              <a:rPr lang="en-US" altLang="zh-TW" smtClean="0"/>
+              <a:rPr lang="en-US" altLang="zh-TW"/>
               <a:t>Third level</a:t>
             </a:r>
           </a:p>
           <a:p>
             <a:pPr lvl="3"/>
             <a:r>
-              <a:rPr lang="en-US" altLang="zh-TW" smtClean="0"/>
+              <a:rPr lang="en-US" altLang="zh-TW"/>
               <a:t>Fourth level</a:t>
             </a:r>
           </a:p>
           <a:p>
             <a:pPr lvl="4"/>
             <a:r>
-              <a:rPr lang="en-US" altLang="zh-TW" smtClean="0"/>
+              <a:rPr lang="en-US" altLang="zh-TW"/>
               <a:t>Fifth level</a:t>
             </a:r>
             <a:endParaRPr lang="zh-TW" altLang="en-US"/>
@@ -475,7 +475,7 @@
           <a:p>
             <a:fld id="{0A97663F-A412-4EA0-B086-A49073A59FF1}" type="datetimeFigureOut">
               <a:rPr lang="zh-TW" altLang="en-US" smtClean="0"/>
-              <a:t>2023/1/14</a:t>
+              <a:t>2024/10/1</a:t>
             </a:fld>
             <a:endParaRPr lang="zh-TW" altLang="en-US"/>
           </a:p>
@@ -569,7 +569,7 @@
           <a:lstStyle/>
           <a:p>
             <a:r>
-              <a:rPr lang="en-US" altLang="zh-TW" smtClean="0"/>
+              <a:rPr lang="en-US" altLang="zh-TW"/>
               <a:t>Click to edit Master title style</a:t>
             </a:r>
             <a:endParaRPr lang="zh-TW" altLang="en-US"/>
@@ -598,35 +598,35 @@
           <a:p>
             <a:pPr lvl="0"/>
             <a:r>
-              <a:rPr lang="en-US" altLang="zh-TW" smtClean="0"/>
+              <a:rPr lang="en-US" altLang="zh-TW"/>
               <a:t>Click to edit Master text styles</a:t>
             </a:r>
           </a:p>
           <a:p>
             <a:pPr lvl="1"/>
             <a:r>
-              <a:rPr lang="en-US" altLang="zh-TW" smtClean="0"/>
+              <a:rPr lang="en-US" altLang="zh-TW"/>
               <a:t>Second level</a:t>
             </a:r>
           </a:p>
           <a:p>
             <a:pPr lvl="2"/>
             <a:r>
-              <a:rPr lang="en-US" altLang="zh-TW" smtClean="0"/>
+              <a:rPr lang="en-US" altLang="zh-TW"/>
               <a:t>Third level</a:t>
             </a:r>
           </a:p>
           <a:p>
             <a:pPr lvl="3"/>
             <a:r>
-              <a:rPr lang="en-US" altLang="zh-TW" smtClean="0"/>
+              <a:rPr lang="en-US" altLang="zh-TW"/>
               <a:t>Fourth level</a:t>
             </a:r>
           </a:p>
           <a:p>
             <a:pPr lvl="4"/>
             <a:r>
-              <a:rPr lang="en-US" altLang="zh-TW" smtClean="0"/>
+              <a:rPr lang="en-US" altLang="zh-TW"/>
               <a:t>Fifth level</a:t>
             </a:r>
             <a:endParaRPr lang="zh-TW" altLang="en-US"/>
@@ -650,7 +650,7 @@
           <a:p>
             <a:fld id="{0A97663F-A412-4EA0-B086-A49073A59FF1}" type="datetimeFigureOut">
               <a:rPr lang="zh-TW" altLang="en-US" smtClean="0"/>
-              <a:t>2023/1/14</a:t>
+              <a:t>2024/10/1</a:t>
             </a:fld>
             <a:endParaRPr lang="zh-TW" altLang="en-US"/>
           </a:p>
@@ -739,7 +739,7 @@
           <a:lstStyle/>
           <a:p>
             <a:r>
-              <a:rPr lang="en-US" altLang="zh-TW" smtClean="0"/>
+              <a:rPr lang="en-US" altLang="zh-TW"/>
               <a:t>Click to edit Master title style</a:t>
             </a:r>
             <a:endParaRPr lang="zh-TW" altLang="en-US"/>
@@ -763,35 +763,35 @@
           <a:p>
             <a:pPr lvl="0"/>
             <a:r>
-              <a:rPr lang="en-US" altLang="zh-TW" smtClean="0"/>
+              <a:rPr lang="en-US" altLang="zh-TW"/>
               <a:t>Click to edit Master text styles</a:t>
             </a:r>
           </a:p>
           <a:p>
             <a:pPr lvl="1"/>
             <a:r>
-              <a:rPr lang="en-US" altLang="zh-TW" smtClean="0"/>
+              <a:rPr lang="en-US" altLang="zh-TW"/>
               <a:t>Second level</a:t>
             </a:r>
           </a:p>
           <a:p>
             <a:pPr lvl="2"/>
             <a:r>
-              <a:rPr lang="en-US" altLang="zh-TW" smtClean="0"/>
+              <a:rPr lang="en-US" altLang="zh-TW"/>
               <a:t>Third level</a:t>
             </a:r>
           </a:p>
           <a:p>
             <a:pPr lvl="3"/>
             <a:r>
-              <a:rPr lang="en-US" altLang="zh-TW" smtClean="0"/>
+              <a:rPr lang="en-US" altLang="zh-TW"/>
               <a:t>Fourth level</a:t>
             </a:r>
           </a:p>
           <a:p>
             <a:pPr lvl="4"/>
             <a:r>
-              <a:rPr lang="en-US" altLang="zh-TW" smtClean="0"/>
+              <a:rPr lang="en-US" altLang="zh-TW"/>
               <a:t>Fifth level</a:t>
             </a:r>
             <a:endParaRPr lang="zh-TW" altLang="en-US"/>
@@ -815,7 +815,7 @@
           <a:p>
             <a:fld id="{0A97663F-A412-4EA0-B086-A49073A59FF1}" type="datetimeFigureOut">
               <a:rPr lang="zh-TW" altLang="en-US" smtClean="0"/>
-              <a:t>2023/1/14</a:t>
+              <a:t>2024/10/1</a:t>
             </a:fld>
             <a:endParaRPr lang="zh-TW" altLang="en-US"/>
           </a:p>
@@ -913,7 +913,7 @@
           </a:lstStyle>
           <a:p>
             <a:r>
-              <a:rPr lang="en-US" altLang="zh-TW" smtClean="0"/>
+              <a:rPr lang="en-US" altLang="zh-TW"/>
               <a:t>Click to edit Master title style</a:t>
             </a:r>
             <a:endParaRPr lang="zh-TW" altLang="en-US"/>
@@ -1033,7 +1033,7 @@
           <a:p>
             <a:pPr lvl="0"/>
             <a:r>
-              <a:rPr lang="en-US" altLang="zh-TW" smtClean="0"/>
+              <a:rPr lang="en-US" altLang="zh-TW"/>
               <a:t>Click to edit Master text styles</a:t>
             </a:r>
           </a:p>
@@ -1056,7 +1056,7 @@
           <a:p>
             <a:fld id="{0A97663F-A412-4EA0-B086-A49073A59FF1}" type="datetimeFigureOut">
               <a:rPr lang="zh-TW" altLang="en-US" smtClean="0"/>
-              <a:t>2023/1/14</a:t>
+              <a:t>2024/10/1</a:t>
             </a:fld>
             <a:endParaRPr lang="zh-TW" altLang="en-US"/>
           </a:p>
@@ -1145,7 +1145,7 @@
           <a:lstStyle/>
           <a:p>
             <a:r>
-              <a:rPr lang="en-US" altLang="zh-TW" smtClean="0"/>
+              <a:rPr lang="en-US" altLang="zh-TW"/>
               <a:t>Click to edit Master title style</a:t>
             </a:r>
             <a:endParaRPr lang="zh-TW" altLang="en-US"/>
@@ -1202,35 +1202,35 @@
           <a:p>
             <a:pPr lvl="0"/>
             <a:r>
-              <a:rPr lang="en-US" altLang="zh-TW" smtClean="0"/>
+              <a:rPr lang="en-US" altLang="zh-TW"/>
               <a:t>Click to edit Master text styles</a:t>
             </a:r>
           </a:p>
           <a:p>
             <a:pPr lvl="1"/>
             <a:r>
-              <a:rPr lang="en-US" altLang="zh-TW" smtClean="0"/>
+              <a:rPr lang="en-US" altLang="zh-TW"/>
               <a:t>Second level</a:t>
             </a:r>
           </a:p>
           <a:p>
             <a:pPr lvl="2"/>
             <a:r>
-              <a:rPr lang="en-US" altLang="zh-TW" smtClean="0"/>
+              <a:rPr lang="en-US" altLang="zh-TW"/>
               <a:t>Third level</a:t>
             </a:r>
           </a:p>
           <a:p>
             <a:pPr lvl="3"/>
             <a:r>
-              <a:rPr lang="en-US" altLang="zh-TW" smtClean="0"/>
+              <a:rPr lang="en-US" altLang="zh-TW"/>
               <a:t>Fourth level</a:t>
             </a:r>
           </a:p>
           <a:p>
             <a:pPr lvl="4"/>
             <a:r>
-              <a:rPr lang="en-US" altLang="zh-TW" smtClean="0"/>
+              <a:rPr lang="en-US" altLang="zh-TW"/>
               <a:t>Fifth level</a:t>
             </a:r>
             <a:endParaRPr lang="zh-TW" altLang="en-US"/>
@@ -1287,35 +1287,35 @@
           <a:p>
             <a:pPr lvl="0"/>
             <a:r>
-              <a:rPr lang="en-US" altLang="zh-TW" smtClean="0"/>
+              <a:rPr lang="en-US" altLang="zh-TW"/>
               <a:t>Click to edit Master text styles</a:t>
             </a:r>
           </a:p>
           <a:p>
             <a:pPr lvl="1"/>
             <a:r>
-              <a:rPr lang="en-US" altLang="zh-TW" smtClean="0"/>
+              <a:rPr lang="en-US" altLang="zh-TW"/>
               <a:t>Second level</a:t>
             </a:r>
           </a:p>
           <a:p>
             <a:pPr lvl="2"/>
             <a:r>
-              <a:rPr lang="en-US" altLang="zh-TW" smtClean="0"/>
+              <a:rPr lang="en-US" altLang="zh-TW"/>
               <a:t>Third level</a:t>
             </a:r>
           </a:p>
           <a:p>
             <a:pPr lvl="3"/>
             <a:r>
-              <a:rPr lang="en-US" altLang="zh-TW" smtClean="0"/>
+              <a:rPr lang="en-US" altLang="zh-TW"/>
               <a:t>Fourth level</a:t>
             </a:r>
           </a:p>
           <a:p>
             <a:pPr lvl="4"/>
             <a:r>
-              <a:rPr lang="en-US" altLang="zh-TW" smtClean="0"/>
+              <a:rPr lang="en-US" altLang="zh-TW"/>
               <a:t>Fifth level</a:t>
             </a:r>
             <a:endParaRPr lang="zh-TW" altLang="en-US"/>
@@ -1339,7 +1339,7 @@
           <a:p>
             <a:fld id="{0A97663F-A412-4EA0-B086-A49073A59FF1}" type="datetimeFigureOut">
               <a:rPr lang="zh-TW" altLang="en-US" smtClean="0"/>
-              <a:t>2023/1/14</a:t>
+              <a:t>2024/10/1</a:t>
             </a:fld>
             <a:endParaRPr lang="zh-TW" altLang="en-US"/>
           </a:p>
@@ -1432,7 +1432,7 @@
           </a:lstStyle>
           <a:p>
             <a:r>
-              <a:rPr lang="en-US" altLang="zh-TW" smtClean="0"/>
+              <a:rPr lang="en-US" altLang="zh-TW"/>
               <a:t>Click to edit Master title style</a:t>
             </a:r>
             <a:endParaRPr lang="zh-TW" altLang="en-US"/>
@@ -1498,7 +1498,7 @@
           <a:p>
             <a:pPr lvl="0"/>
             <a:r>
-              <a:rPr lang="en-US" altLang="zh-TW" smtClean="0"/>
+              <a:rPr lang="en-US" altLang="zh-TW"/>
               <a:t>Click to edit Master text styles</a:t>
             </a:r>
           </a:p>
@@ -1554,35 +1554,35 @@
           <a:p>
             <a:pPr lvl="0"/>
             <a:r>
-              <a:rPr lang="en-US" altLang="zh-TW" smtClean="0"/>
+              <a:rPr lang="en-US" altLang="zh-TW"/>
               <a:t>Click to edit Master text styles</a:t>
             </a:r>
           </a:p>
           <a:p>
             <a:pPr lvl="1"/>
             <a:r>
-              <a:rPr lang="en-US" altLang="zh-TW" smtClean="0"/>
+              <a:rPr lang="en-US" altLang="zh-TW"/>
               <a:t>Second level</a:t>
             </a:r>
           </a:p>
           <a:p>
             <a:pPr lvl="2"/>
             <a:r>
-              <a:rPr lang="en-US" altLang="zh-TW" smtClean="0"/>
+              <a:rPr lang="en-US" altLang="zh-TW"/>
               <a:t>Third level</a:t>
             </a:r>
           </a:p>
           <a:p>
             <a:pPr lvl="3"/>
             <a:r>
-              <a:rPr lang="en-US" altLang="zh-TW" smtClean="0"/>
+              <a:rPr lang="en-US" altLang="zh-TW"/>
               <a:t>Fourth level</a:t>
             </a:r>
           </a:p>
           <a:p>
             <a:pPr lvl="4"/>
             <a:r>
-              <a:rPr lang="en-US" altLang="zh-TW" smtClean="0"/>
+              <a:rPr lang="en-US" altLang="zh-TW"/>
               <a:t>Fifth level</a:t>
             </a:r>
             <a:endParaRPr lang="zh-TW" altLang="en-US"/>
@@ -1648,7 +1648,7 @@
           <a:p>
             <a:pPr lvl="0"/>
             <a:r>
-              <a:rPr lang="en-US" altLang="zh-TW" smtClean="0"/>
+              <a:rPr lang="en-US" altLang="zh-TW"/>
               <a:t>Click to edit Master text styles</a:t>
             </a:r>
           </a:p>
@@ -1704,35 +1704,35 @@
           <a:p>
             <a:pPr lvl="0"/>
             <a:r>
-              <a:rPr lang="en-US" altLang="zh-TW" smtClean="0"/>
+              <a:rPr lang="en-US" altLang="zh-TW"/>
               <a:t>Click to edit Master text styles</a:t>
             </a:r>
           </a:p>
           <a:p>
             <a:pPr lvl="1"/>
             <a:r>
-              <a:rPr lang="en-US" altLang="zh-TW" smtClean="0"/>
+              <a:rPr lang="en-US" altLang="zh-TW"/>
               <a:t>Second level</a:t>
             </a:r>
           </a:p>
           <a:p>
             <a:pPr lvl="2"/>
             <a:r>
-              <a:rPr lang="en-US" altLang="zh-TW" smtClean="0"/>
+              <a:rPr lang="en-US" altLang="zh-TW"/>
               <a:t>Third level</a:t>
             </a:r>
           </a:p>
           <a:p>
             <a:pPr lvl="3"/>
             <a:r>
-              <a:rPr lang="en-US" altLang="zh-TW" smtClean="0"/>
+              <a:rPr lang="en-US" altLang="zh-TW"/>
               <a:t>Fourth level</a:t>
             </a:r>
           </a:p>
           <a:p>
             <a:pPr lvl="4"/>
             <a:r>
-              <a:rPr lang="en-US" altLang="zh-TW" smtClean="0"/>
+              <a:rPr lang="en-US" altLang="zh-TW"/>
               <a:t>Fifth level</a:t>
             </a:r>
             <a:endParaRPr lang="zh-TW" altLang="en-US"/>
@@ -1756,7 +1756,7 @@
           <a:p>
             <a:fld id="{0A97663F-A412-4EA0-B086-A49073A59FF1}" type="datetimeFigureOut">
               <a:rPr lang="zh-TW" altLang="en-US" smtClean="0"/>
-              <a:t>2023/1/14</a:t>
+              <a:t>2024/10/1</a:t>
             </a:fld>
             <a:endParaRPr lang="zh-TW" altLang="en-US"/>
           </a:p>
@@ -1845,7 +1845,7 @@
           <a:lstStyle/>
           <a:p>
             <a:r>
-              <a:rPr lang="en-US" altLang="zh-TW" smtClean="0"/>
+              <a:rPr lang="en-US" altLang="zh-TW"/>
               <a:t>Click to edit Master title style</a:t>
             </a:r>
             <a:endParaRPr lang="zh-TW" altLang="en-US"/>
@@ -1869,7 +1869,7 @@
           <a:p>
             <a:fld id="{0A97663F-A412-4EA0-B086-A49073A59FF1}" type="datetimeFigureOut">
               <a:rPr lang="zh-TW" altLang="en-US" smtClean="0"/>
-              <a:t>2023/1/14</a:t>
+              <a:t>2024/10/1</a:t>
             </a:fld>
             <a:endParaRPr lang="zh-TW" altLang="en-US"/>
           </a:p>
@@ -1959,7 +1959,7 @@
           <a:p>
             <a:fld id="{0A97663F-A412-4EA0-B086-A49073A59FF1}" type="datetimeFigureOut">
               <a:rPr lang="zh-TW" altLang="en-US" smtClean="0"/>
-              <a:t>2023/1/14</a:t>
+              <a:t>2024/10/1</a:t>
             </a:fld>
             <a:endParaRPr lang="zh-TW" altLang="en-US"/>
           </a:p>
@@ -2057,7 +2057,7 @@
           </a:lstStyle>
           <a:p>
             <a:r>
-              <a:rPr lang="en-US" altLang="zh-TW" smtClean="0"/>
+              <a:rPr lang="en-US" altLang="zh-TW"/>
               <a:t>Click to edit Master title style</a:t>
             </a:r>
             <a:endParaRPr lang="zh-TW" altLang="en-US"/>
@@ -2114,35 +2114,35 @@
           <a:p>
             <a:pPr lvl="0"/>
             <a:r>
-              <a:rPr lang="en-US" altLang="zh-TW" smtClean="0"/>
+              <a:rPr lang="en-US" altLang="zh-TW"/>
               <a:t>Click to edit Master text styles</a:t>
             </a:r>
           </a:p>
           <a:p>
             <a:pPr lvl="1"/>
             <a:r>
-              <a:rPr lang="en-US" altLang="zh-TW" smtClean="0"/>
+              <a:rPr lang="en-US" altLang="zh-TW"/>
               <a:t>Second level</a:t>
             </a:r>
           </a:p>
           <a:p>
             <a:pPr lvl="2"/>
             <a:r>
-              <a:rPr lang="en-US" altLang="zh-TW" smtClean="0"/>
+              <a:rPr lang="en-US" altLang="zh-TW"/>
               <a:t>Third level</a:t>
             </a:r>
           </a:p>
           <a:p>
             <a:pPr lvl="3"/>
             <a:r>
-              <a:rPr lang="en-US" altLang="zh-TW" smtClean="0"/>
+              <a:rPr lang="en-US" altLang="zh-TW"/>
               <a:t>Fourth level</a:t>
             </a:r>
           </a:p>
           <a:p>
             <a:pPr lvl="4"/>
             <a:r>
-              <a:rPr lang="en-US" altLang="zh-TW" smtClean="0"/>
+              <a:rPr lang="en-US" altLang="zh-TW"/>
               <a:t>Fifth level</a:t>
             </a:r>
             <a:endParaRPr lang="zh-TW" altLang="en-US"/>
@@ -2208,7 +2208,7 @@
           <a:p>
             <a:pPr lvl="0"/>
             <a:r>
-              <a:rPr lang="en-US" altLang="zh-TW" smtClean="0"/>
+              <a:rPr lang="en-US" altLang="zh-TW"/>
               <a:t>Click to edit Master text styles</a:t>
             </a:r>
           </a:p>
@@ -2231,7 +2231,7 @@
           <a:p>
             <a:fld id="{0A97663F-A412-4EA0-B086-A49073A59FF1}" type="datetimeFigureOut">
               <a:rPr lang="zh-TW" altLang="en-US" smtClean="0"/>
-              <a:t>2023/1/14</a:t>
+              <a:t>2024/10/1</a:t>
             </a:fld>
             <a:endParaRPr lang="zh-TW" altLang="en-US"/>
           </a:p>
@@ -2329,7 +2329,7 @@
           </a:lstStyle>
           <a:p>
             <a:r>
-              <a:rPr lang="en-US" altLang="zh-TW" smtClean="0"/>
+              <a:rPr lang="en-US" altLang="zh-TW"/>
               <a:t>Click to edit Master title style</a:t>
             </a:r>
             <a:endParaRPr lang="zh-TW" altLang="en-US"/>
@@ -2394,7 +2394,7 @@
           </a:lstStyle>
           <a:p>
             <a:r>
-              <a:rPr lang="en-US" altLang="zh-TW" smtClean="0"/>
+              <a:rPr lang="en-US" altLang="zh-TW"/>
               <a:t>Click icon to add picture</a:t>
             </a:r>
             <a:endParaRPr lang="zh-TW" altLang="en-US"/>
@@ -2460,7 +2460,7 @@
           <a:p>
             <a:pPr lvl="0"/>
             <a:r>
-              <a:rPr lang="en-US" altLang="zh-TW" smtClean="0"/>
+              <a:rPr lang="en-US" altLang="zh-TW"/>
               <a:t>Click to edit Master text styles</a:t>
             </a:r>
           </a:p>
@@ -2483,7 +2483,7 @@
           <a:p>
             <a:fld id="{0A97663F-A412-4EA0-B086-A49073A59FF1}" type="datetimeFigureOut">
               <a:rPr lang="zh-TW" altLang="en-US" smtClean="0"/>
-              <a:t>2023/1/14</a:t>
+              <a:t>2024/10/1</a:t>
             </a:fld>
             <a:endParaRPr lang="zh-TW" altLang="en-US"/>
           </a:p>
@@ -2592,10 +2592,9 @@
           <a:lstStyle/>
           <a:p>
             <a:r>
-              <a:rPr lang="zh-TW" altLang="en-US" smtClean="0"/>
+              <a:rPr lang="zh-TW" altLang="en-US"/>
               <a:t>按一下以編輯母片標題樣式</a:t>
             </a:r>
-            <a:endParaRPr lang="zh-TW" altLang="en-US"/>
           </a:p>
         </p:txBody>
       </p:sp>
@@ -2626,38 +2625,37 @@
           <a:p>
             <a:pPr lvl="0"/>
             <a:r>
-              <a:rPr lang="zh-TW" altLang="en-US" smtClean="0"/>
+              <a:rPr lang="zh-TW" altLang="en-US"/>
               <a:t>按一下以編輯母片文字樣式</a:t>
             </a:r>
           </a:p>
           <a:p>
             <a:pPr lvl="1"/>
             <a:r>
-              <a:rPr lang="zh-TW" altLang="en-US" smtClean="0"/>
+              <a:rPr lang="zh-TW" altLang="en-US"/>
               <a:t>第二層</a:t>
             </a:r>
           </a:p>
           <a:p>
             <a:pPr lvl="2"/>
             <a:r>
-              <a:rPr lang="zh-TW" altLang="en-US" smtClean="0"/>
+              <a:rPr lang="zh-TW" altLang="en-US"/>
               <a:t>第三層</a:t>
             </a:r>
           </a:p>
           <a:p>
             <a:pPr lvl="3"/>
             <a:r>
-              <a:rPr lang="zh-TW" altLang="en-US" smtClean="0"/>
+              <a:rPr lang="zh-TW" altLang="en-US"/>
               <a:t>第四層</a:t>
             </a:r>
           </a:p>
           <a:p>
             <a:pPr lvl="4"/>
             <a:r>
-              <a:rPr lang="zh-TW" altLang="en-US" smtClean="0"/>
+              <a:rPr lang="zh-TW" altLang="en-US"/>
               <a:t>第五層</a:t>
             </a:r>
-            <a:endParaRPr lang="zh-TW" altLang="en-US"/>
           </a:p>
         </p:txBody>
       </p:sp>
@@ -2696,7 +2694,7 @@
           <a:p>
             <a:fld id="{0A97663F-A412-4EA0-B086-A49073A59FF1}" type="datetimeFigureOut">
               <a:rPr lang="zh-TW" altLang="en-US" smtClean="0"/>
-              <a:t>2023/1/14</a:t>
+              <a:t>2024/10/1</a:t>
             </a:fld>
             <a:endParaRPr lang="zh-TW" altLang="en-US"/>
           </a:p>
@@ -3089,7 +3087,7 @@
           <a:lstStyle/>
           <a:p>
             <a:r>
-              <a:rPr lang="zh-TW" altLang="en-US" sz="5400" b="1" i="1" dirty="0" smtClean="0">
+              <a:rPr lang="zh-TW" altLang="en-US" sz="5400" b="1" i="1" dirty="0">
                 <a:solidFill>
                   <a:srgbClr val="660033"/>
                 </a:solidFill>
@@ -3103,24 +3101,7 @@
                 <a:latin typeface="微軟正黑體" pitchFamily="34" charset="-120"/>
                 <a:ea typeface="微軟正黑體" pitchFamily="34" charset="-120"/>
               </a:rPr>
-              <a:t>順</a:t>
-            </a:r>
-            <a:r>
-              <a:rPr lang="zh-TW" altLang="en-US" sz="5400" b="1" i="1" dirty="0">
-                <a:solidFill>
-                  <a:srgbClr val="660033"/>
-                </a:solidFill>
-                <a:effectLst>
-                  <a:outerShdw blurRad="38100" dist="38100" dir="2700000" algn="tl">
-                    <a:srgbClr val="000000">
-                      <a:alpha val="43137"/>
-                    </a:srgbClr>
-                  </a:outerShdw>
-                </a:effectLst>
-                <a:latin typeface="微軟正黑體" pitchFamily="34" charset="-120"/>
-                <a:ea typeface="微軟正黑體" pitchFamily="34" charset="-120"/>
-              </a:rPr>
-              <a:t>服</a:t>
+              <a:t>順服</a:t>
             </a:r>
           </a:p>
         </p:txBody>
@@ -3303,7 +3284,7 @@
                 <a:latin typeface="Microsoft JhengHei" panose="020B0604030504040204" pitchFamily="34" charset="-120"/>
                 <a:ea typeface="Microsoft JhengHei" panose="020B0604030504040204" pitchFamily="34" charset="-120"/>
               </a:rPr>
-              <a:t>正</a:t>
+              <a:t>正歌</a:t>
             </a:r>
             <a:r>
               <a:rPr lang="en-US" sz="2800" b="1" dirty="0">
@@ -3397,7 +3378,7 @@
                 <a:latin typeface="微軟正黑體" pitchFamily="34" charset="-120"/>
                 <a:ea typeface="微軟正黑體" pitchFamily="34" charset="-120"/>
               </a:rPr>
-              <a:t>袮</a:t>
+              <a:t>祢</a:t>
             </a:r>
             <a:r>
               <a:rPr lang="en-US" altLang="zh-TW" sz="4800" b="1" dirty="0">
@@ -3427,7 +3408,7 @@
                 <a:latin typeface="微軟正黑體" pitchFamily="34" charset="-120"/>
                 <a:ea typeface="微軟正黑體" pitchFamily="34" charset="-120"/>
               </a:rPr>
-              <a:t>袮</a:t>
+              <a:t>祢</a:t>
             </a:r>
             <a:endParaRPr lang="en-US" altLang="zh-TW" sz="4800" b="1" dirty="0">
               <a:solidFill>
@@ -3522,7 +3503,7 @@
                 <a:latin typeface="Microsoft JhengHei" panose="020B0604030504040204" pitchFamily="34" charset="-120"/>
                 <a:ea typeface="Microsoft JhengHei" panose="020B0604030504040204" pitchFamily="34" charset="-120"/>
               </a:rPr>
-              <a:t>正</a:t>
+              <a:t>正歌</a:t>
             </a:r>
             <a:r>
               <a:rPr lang="en-US" sz="2800" b="1" dirty="0">
@@ -3616,7 +3597,7 @@
                 <a:latin typeface="微軟正黑體" pitchFamily="34" charset="-120"/>
                 <a:ea typeface="微軟正黑體" pitchFamily="34" charset="-120"/>
               </a:rPr>
-              <a:t>袮</a:t>
+              <a:t>祢</a:t>
             </a:r>
             <a:r>
               <a:rPr lang="zh-TW" altLang="en-US" sz="4800" b="1" dirty="0">
@@ -3626,19 +3607,9 @@
                 <a:latin typeface="微軟正黑體" pitchFamily="34" charset="-120"/>
                 <a:ea typeface="微軟正黑體" pitchFamily="34" charset="-120"/>
               </a:rPr>
-              <a:t>的意</a:t>
-            </a:r>
-            <a:r>
-              <a:rPr lang="zh-TW" altLang="en-US" sz="4800" b="1" dirty="0" smtClean="0">
-                <a:solidFill>
-                  <a:srgbClr val="660033"/>
-                </a:solidFill>
-                <a:latin typeface="微軟正黑體" pitchFamily="34" charset="-120"/>
-                <a:ea typeface="微軟正黑體" pitchFamily="34" charset="-120"/>
-              </a:rPr>
-              <a:t>念</a:t>
-            </a:r>
-            <a:endParaRPr lang="en-US" altLang="zh-TW" sz="4800" b="1" dirty="0" smtClean="0">
+              <a:t>的意念</a:t>
+            </a:r>
+            <a:endParaRPr lang="en-US" altLang="zh-TW" sz="4800" b="1" dirty="0">
               <a:solidFill>
                 <a:srgbClr val="660033"/>
               </a:solidFill>
@@ -3651,24 +3622,14 @@
               <a:buNone/>
             </a:pPr>
             <a:r>
-              <a:rPr lang="zh-TW" altLang="en-US" sz="4800" b="1" dirty="0" smtClean="0">
+              <a:rPr lang="zh-TW" altLang="en-US" sz="4800" b="1" dirty="0">
                 <a:solidFill>
                   <a:srgbClr val="660033"/>
                 </a:solidFill>
                 <a:latin typeface="微軟正黑體" pitchFamily="34" charset="-120"/>
                 <a:ea typeface="微軟正黑體" pitchFamily="34" charset="-120"/>
               </a:rPr>
-              <a:t>高</a:t>
-            </a:r>
-            <a:r>
-              <a:rPr lang="zh-TW" altLang="en-US" sz="4800" b="1" dirty="0">
-                <a:solidFill>
-                  <a:srgbClr val="660033"/>
-                </a:solidFill>
-                <a:latin typeface="微軟正黑體" pitchFamily="34" charset="-120"/>
-                <a:ea typeface="微軟正黑體" pitchFamily="34" charset="-120"/>
-              </a:rPr>
-              <a:t>過我的意念</a:t>
+              <a:t>高過我的意念</a:t>
             </a:r>
             <a:endParaRPr lang="en-US" altLang="zh-TW" sz="4800" b="1" dirty="0">
               <a:solidFill>
@@ -3714,34 +3675,24 @@
               <a:t>( </a:t>
             </a:r>
             <a:r>
-              <a:rPr lang="zh-CN" altLang="en-US" sz="2800" b="1" dirty="0" smtClean="0">
+              <a:rPr lang="zh-CN" altLang="en-US" sz="2800" b="1" dirty="0">
                 <a:solidFill>
                   <a:srgbClr val="660033"/>
                 </a:solidFill>
                 <a:latin typeface="Microsoft JhengHei" panose="020B0604030504040204" pitchFamily="34" charset="-120"/>
                 <a:ea typeface="Microsoft JhengHei" panose="020B0604030504040204" pitchFamily="34" charset="-120"/>
               </a:rPr>
-              <a:t>副</a:t>
-            </a:r>
-            <a:r>
-              <a:rPr lang="en-US" sz="2800" b="1" dirty="0" smtClean="0">
+              <a:t>副歌</a:t>
+            </a:r>
+            <a:r>
+              <a:rPr lang="en-US" sz="2800" b="1" dirty="0">
                 <a:solidFill>
                   <a:srgbClr val="660033"/>
                 </a:solidFill>
                 <a:latin typeface="Microsoft JhengHei" panose="020B0604030504040204" pitchFamily="34" charset="-120"/>
                 <a:ea typeface="Microsoft JhengHei" panose="020B0604030504040204" pitchFamily="34" charset="-120"/>
               </a:rPr>
-              <a:t> </a:t>
-            </a:r>
-            <a:r>
-              <a:rPr lang="en-US" sz="2800" b="1" dirty="0">
-                <a:solidFill>
-                  <a:srgbClr val="660033"/>
-                </a:solidFill>
-                <a:latin typeface="Microsoft JhengHei" panose="020B0604030504040204" pitchFamily="34" charset="-120"/>
-                <a:ea typeface="Microsoft JhengHei" panose="020B0604030504040204" pitchFamily="34" charset="-120"/>
-              </a:rPr>
-              <a:t>)</a:t>
+              <a:t> )</a:t>
             </a:r>
             <a:endParaRPr lang="vi-VN" sz="2800" b="1" dirty="0">
               <a:solidFill>
@@ -3815,19 +3766,9 @@
                 <a:latin typeface="微軟正黑體" pitchFamily="34" charset="-120"/>
                 <a:ea typeface="微軟正黑體" pitchFamily="34" charset="-120"/>
               </a:rPr>
-              <a:t>萬事互相效</a:t>
-            </a:r>
-            <a:r>
-              <a:rPr lang="zh-TW" altLang="en-US" sz="4800" b="1" dirty="0" smtClean="0">
-                <a:solidFill>
-                  <a:srgbClr val="660033"/>
-                </a:solidFill>
-                <a:latin typeface="微軟正黑體" pitchFamily="34" charset="-120"/>
-                <a:ea typeface="微軟正黑體" pitchFamily="34" charset="-120"/>
-              </a:rPr>
-              <a:t>力</a:t>
-            </a:r>
-            <a:endParaRPr lang="en-US" altLang="zh-TW" sz="4800" b="1" dirty="0" smtClean="0">
+              <a:t>萬事互相效力</a:t>
+            </a:r>
+            <a:endParaRPr lang="en-US" altLang="zh-TW" sz="4800" b="1" dirty="0">
               <a:solidFill>
                 <a:srgbClr val="660033"/>
               </a:solidFill>
@@ -3840,24 +3781,14 @@
               <a:buNone/>
             </a:pPr>
             <a:r>
-              <a:rPr lang="zh-TW" altLang="en-US" sz="4800" b="1" dirty="0" smtClean="0">
+              <a:rPr lang="zh-TW" altLang="en-US" sz="4800" b="1" dirty="0">
                 <a:solidFill>
                   <a:srgbClr val="660033"/>
                 </a:solidFill>
                 <a:latin typeface="微軟正黑體" pitchFamily="34" charset="-120"/>
                 <a:ea typeface="微軟正黑體" pitchFamily="34" charset="-120"/>
               </a:rPr>
-              <a:t>叫</a:t>
-            </a:r>
-            <a:r>
-              <a:rPr lang="zh-TW" altLang="en-US" sz="4800" b="1" dirty="0">
-                <a:solidFill>
-                  <a:srgbClr val="660033"/>
-                </a:solidFill>
-                <a:latin typeface="微軟正黑體" pitchFamily="34" charset="-120"/>
-                <a:ea typeface="微軟正黑體" pitchFamily="34" charset="-120"/>
-              </a:rPr>
-              <a:t>愛神的人得益處</a:t>
+              <a:t>叫愛神的人得益處</a:t>
             </a:r>
             <a:endParaRPr lang="en-US" altLang="zh-TW" sz="4800" b="1" dirty="0">
               <a:solidFill>
@@ -3903,34 +3834,24 @@
               <a:t>( </a:t>
             </a:r>
             <a:r>
-              <a:rPr lang="zh-CN" altLang="en-US" sz="2800" b="1" dirty="0" smtClean="0">
+              <a:rPr lang="zh-CN" altLang="en-US" sz="2800" b="1" dirty="0">
                 <a:solidFill>
                   <a:srgbClr val="660033"/>
                 </a:solidFill>
                 <a:latin typeface="Microsoft JhengHei" panose="020B0604030504040204" pitchFamily="34" charset="-120"/>
                 <a:ea typeface="Microsoft JhengHei" panose="020B0604030504040204" pitchFamily="34" charset="-120"/>
               </a:rPr>
-              <a:t>副</a:t>
-            </a:r>
-            <a:r>
-              <a:rPr lang="en-US" sz="2800" b="1" dirty="0" smtClean="0">
+              <a:t>副歌</a:t>
+            </a:r>
+            <a:r>
+              <a:rPr lang="en-US" sz="2800" b="1" dirty="0">
                 <a:solidFill>
                   <a:srgbClr val="660033"/>
                 </a:solidFill>
                 <a:latin typeface="Microsoft JhengHei" panose="020B0604030504040204" pitchFamily="34" charset="-120"/>
                 <a:ea typeface="Microsoft JhengHei" panose="020B0604030504040204" pitchFamily="34" charset="-120"/>
               </a:rPr>
-              <a:t> </a:t>
-            </a:r>
-            <a:r>
-              <a:rPr lang="en-US" sz="2800" b="1" dirty="0">
-                <a:solidFill>
-                  <a:srgbClr val="660033"/>
-                </a:solidFill>
-                <a:latin typeface="Microsoft JhengHei" panose="020B0604030504040204" pitchFamily="34" charset="-120"/>
-                <a:ea typeface="Microsoft JhengHei" panose="020B0604030504040204" pitchFamily="34" charset="-120"/>
-              </a:rPr>
-              <a:t>)</a:t>
+              <a:t> )</a:t>
             </a:r>
             <a:endParaRPr lang="vi-VN" sz="2800" b="1" dirty="0">
               <a:solidFill>
@@ -4014,7 +3935,7 @@
                 <a:latin typeface="微軟正黑體" pitchFamily="34" charset="-120"/>
                 <a:ea typeface="微軟正黑體" pitchFamily="34" charset="-120"/>
               </a:rPr>
-              <a:t>袮</a:t>
+              <a:t>祢</a:t>
             </a:r>
             <a:r>
               <a:rPr lang="zh-TW" altLang="en-US" sz="4800" b="1" dirty="0">
@@ -4105,34 +4026,24 @@
               <a:t>( </a:t>
             </a:r>
             <a:r>
-              <a:rPr lang="zh-CN" altLang="en-US" sz="2800" b="1" dirty="0" smtClean="0">
+              <a:rPr lang="zh-CN" altLang="en-US" sz="2800" b="1" dirty="0">
                 <a:solidFill>
                   <a:srgbClr val="660033"/>
                 </a:solidFill>
                 <a:latin typeface="Microsoft JhengHei" panose="020B0604030504040204" pitchFamily="34" charset="-120"/>
                 <a:ea typeface="Microsoft JhengHei" panose="020B0604030504040204" pitchFamily="34" charset="-120"/>
               </a:rPr>
-              <a:t>副</a:t>
-            </a:r>
-            <a:r>
-              <a:rPr lang="en-US" sz="2800" b="1" dirty="0" smtClean="0">
+              <a:t>副歌</a:t>
+            </a:r>
+            <a:r>
+              <a:rPr lang="en-US" sz="2800" b="1" dirty="0">
                 <a:solidFill>
                   <a:srgbClr val="660033"/>
                 </a:solidFill>
                 <a:latin typeface="Microsoft JhengHei" panose="020B0604030504040204" pitchFamily="34" charset="-120"/>
                 <a:ea typeface="Microsoft JhengHei" panose="020B0604030504040204" pitchFamily="34" charset="-120"/>
               </a:rPr>
-              <a:t> </a:t>
-            </a:r>
-            <a:r>
-              <a:rPr lang="en-US" sz="2800" b="1" dirty="0">
-                <a:solidFill>
-                  <a:srgbClr val="660033"/>
-                </a:solidFill>
-                <a:latin typeface="Microsoft JhengHei" panose="020B0604030504040204" pitchFamily="34" charset="-120"/>
-                <a:ea typeface="Microsoft JhengHei" panose="020B0604030504040204" pitchFamily="34" charset="-120"/>
-              </a:rPr>
-              <a:t>)</a:t>
+              <a:t> )</a:t>
             </a:r>
             <a:endParaRPr lang="vi-VN" sz="2800" b="1" dirty="0">
               <a:solidFill>
@@ -4216,7 +4127,7 @@
                 <a:latin typeface="微軟正黑體" pitchFamily="34" charset="-120"/>
                 <a:ea typeface="微軟正黑體" pitchFamily="34" charset="-120"/>
               </a:rPr>
-              <a:t>袮</a:t>
+              <a:t>祢</a:t>
             </a:r>
             <a:r>
               <a:rPr lang="zh-TW" altLang="en-US" sz="4800" b="1" dirty="0">
@@ -4226,57 +4137,37 @@
                 <a:latin typeface="微軟正黑體" pitchFamily="34" charset="-120"/>
                 <a:ea typeface="微軟正黑體" pitchFamily="34" charset="-120"/>
               </a:rPr>
-              <a:t>的應</a:t>
-            </a:r>
-            <a:r>
-              <a:rPr lang="zh-TW" altLang="en-US" sz="4800" b="1" dirty="0" smtClean="0">
+              <a:t>的應許</a:t>
+            </a:r>
+            <a:r>
+              <a:rPr lang="en-US" altLang="zh-TW" sz="4800" b="1" dirty="0">
                 <a:solidFill>
                   <a:srgbClr val="660033"/>
                 </a:solidFill>
                 <a:latin typeface="微軟正黑體" pitchFamily="34" charset="-120"/>
                 <a:ea typeface="微軟正黑體" pitchFamily="34" charset="-120"/>
               </a:rPr>
-              <a:t>許</a:t>
-            </a:r>
-            <a:r>
-              <a:rPr lang="en-US" altLang="zh-TW" sz="4800" b="1" dirty="0" smtClean="0">
+              <a:t>  </a:t>
+            </a:r>
+            <a:r>
+              <a:rPr lang="zh-TW" altLang="en-US" sz="4800" b="1" dirty="0">
                 <a:solidFill>
                   <a:srgbClr val="660033"/>
                 </a:solidFill>
                 <a:latin typeface="微軟正黑體" pitchFamily="34" charset="-120"/>
                 <a:ea typeface="微軟正黑體" pitchFamily="34" charset="-120"/>
               </a:rPr>
-              <a:t>  </a:t>
-            </a:r>
-            <a:r>
-              <a:rPr lang="zh-TW" altLang="en-US" sz="4800" b="1" dirty="0" smtClean="0">
+              <a:t>倚靠</a:t>
+            </a:r>
+            <a:r>
+              <a:rPr lang="zh-CN" altLang="en-US" sz="4800" b="1" dirty="0">
                 <a:solidFill>
                   <a:srgbClr val="660033"/>
                 </a:solidFill>
                 <a:latin typeface="微軟正黑體" pitchFamily="34" charset="-120"/>
                 <a:ea typeface="微軟正黑體" pitchFamily="34" charset="-120"/>
               </a:rPr>
-              <a:t>倚</a:t>
-            </a:r>
-            <a:r>
-              <a:rPr lang="zh-TW" altLang="en-US" sz="4800" b="1" dirty="0">
-                <a:solidFill>
-                  <a:srgbClr val="660033"/>
-                </a:solidFill>
-                <a:latin typeface="微軟正黑體" pitchFamily="34" charset="-120"/>
-                <a:ea typeface="微軟正黑體" pitchFamily="34" charset="-120"/>
-              </a:rPr>
-              <a:t>靠</a:t>
-            </a:r>
-            <a:r>
-              <a:rPr lang="zh-CN" altLang="en-US" sz="4800" b="1" dirty="0">
-                <a:solidFill>
-                  <a:srgbClr val="660033"/>
-                </a:solidFill>
-                <a:latin typeface="微軟正黑體" pitchFamily="34" charset="-120"/>
-                <a:ea typeface="微軟正黑體" pitchFamily="34" charset="-120"/>
-              </a:rPr>
-              <a:t>袮</a:t>
+              <a:t>祢</a:t>
             </a:r>
             <a:r>
               <a:rPr lang="zh-TW" altLang="en-US" sz="4800" b="1" dirty="0">
@@ -4301,24 +4192,14 @@
               <a:buNone/>
             </a:pPr>
             <a:r>
-              <a:rPr lang="zh-TW" altLang="en-US" sz="4800" b="1" dirty="0" smtClean="0">
+              <a:rPr lang="zh-TW" altLang="en-US" sz="4800" b="1" dirty="0">
                 <a:solidFill>
                   <a:srgbClr val="660033"/>
                 </a:solidFill>
                 <a:latin typeface="微軟正黑體" pitchFamily="34" charset="-120"/>
                 <a:ea typeface="微軟正黑體" pitchFamily="34" charset="-120"/>
               </a:rPr>
-              <a:t>我</a:t>
-            </a:r>
-            <a:r>
-              <a:rPr lang="zh-TW" altLang="en-US" sz="4800" b="1" dirty="0">
-                <a:solidFill>
-                  <a:srgbClr val="660033"/>
-                </a:solidFill>
-                <a:latin typeface="微軟正黑體" pitchFamily="34" charset="-120"/>
-                <a:ea typeface="微軟正黑體" pitchFamily="34" charset="-120"/>
-              </a:rPr>
-              <a:t>甘願謙卑順服</a:t>
+              <a:t>我甘願謙卑順服</a:t>
             </a:r>
           </a:p>
         </p:txBody>
@@ -4357,34 +4238,24 @@
               <a:t>( </a:t>
             </a:r>
             <a:r>
-              <a:rPr lang="zh-CN" altLang="en-US" sz="2800" b="1" dirty="0" smtClean="0">
+              <a:rPr lang="zh-CN" altLang="en-US" sz="2800" b="1" dirty="0">
                 <a:solidFill>
                   <a:srgbClr val="660033"/>
                 </a:solidFill>
                 <a:latin typeface="Microsoft JhengHei" panose="020B0604030504040204" pitchFamily="34" charset="-120"/>
                 <a:ea typeface="Microsoft JhengHei" panose="020B0604030504040204" pitchFamily="34" charset="-120"/>
               </a:rPr>
-              <a:t>尾</a:t>
-            </a:r>
-            <a:r>
-              <a:rPr lang="en-US" sz="2800" b="1" dirty="0" smtClean="0">
+              <a:t>結尾</a:t>
+            </a:r>
+            <a:r>
+              <a:rPr lang="en-US" sz="2800" b="1" dirty="0">
                 <a:solidFill>
                   <a:srgbClr val="660033"/>
                 </a:solidFill>
                 <a:latin typeface="Microsoft JhengHei" panose="020B0604030504040204" pitchFamily="34" charset="-120"/>
                 <a:ea typeface="Microsoft JhengHei" panose="020B0604030504040204" pitchFamily="34" charset="-120"/>
               </a:rPr>
-              <a:t> </a:t>
-            </a:r>
-            <a:r>
-              <a:rPr lang="en-US" sz="2800" b="1" dirty="0">
-                <a:solidFill>
-                  <a:srgbClr val="660033"/>
-                </a:solidFill>
-                <a:latin typeface="Microsoft JhengHei" panose="020B0604030504040204" pitchFamily="34" charset="-120"/>
-                <a:ea typeface="Microsoft JhengHei" panose="020B0604030504040204" pitchFamily="34" charset="-120"/>
-              </a:rPr>
-              <a:t>)</a:t>
+              <a:t> )</a:t>
             </a:r>
             <a:endParaRPr lang="vi-VN" sz="2800" b="1" dirty="0">
               <a:solidFill>
